--- a/tests/fixtures/ink.pptx
+++ b/tests/fixtures/ink.pptx
@@ -31,7 +31,7 @@
     </p:spTree>
   </p:cSld>
   <p:clrMapOvr>
-    <a:overrideClrMapping/>
+    <a:masterClrMapping/>
   </p:clrMapOvr>
 </p:sldLayout>
 </file>
